--- a/Documents/Pitch-Deck/RWA_Experts_Condensed.pptx
+++ b/Documents/Pitch-Deck/RWA_Experts_Condensed.pptx
@@ -5,7 +5,7 @@
     <p:sldMasterId id="2147483648" r:id="rId1"/>
   </p:sldMasterIdLst>
   <p:notesMasterIdLst>
-    <p:notesMasterId r:id="rId8"/>
+    <p:notesMasterId r:id="rId9"/>
   </p:notesMasterIdLst>
   <p:sldIdLst>
     <p:sldId id="256" r:id="rId2"/>
@@ -14,6 +14,7 @@
     <p:sldId id="259" r:id="rId5"/>
     <p:sldId id="260" r:id="rId6"/>
     <p:sldId id="261" r:id="rId7"/>
+    <p:sldId id="262" r:id="rId8"/>
   </p:sldIdLst>
   <p:sldSz cx="9144000" cy="5143500" type="screen16x9"/>
   <p:notesSz cx="5143500" cy="9144000"/>
@@ -15269,7 +15270,29 @@
                 <a:ea typeface="Cambria" pitchFamily="34" charset="-122"/>
                 <a:cs typeface="Cambria" pitchFamily="34" charset="-120"/>
               </a:rPr>
-              <a:t>85% Gross Margins — Mainnet Q2 2026 — Series A 2027</a:t>
+              <a:t>85% Gross Margins — </a:t>
+            </a:r>
+            <a:r>
+              <a:rPr lang="en-US" sz="2000" b="1" dirty="0" err="1">
+                <a:solidFill>
+                  <a:srgbClr val="F5F3EE"/>
+                </a:solidFill>
+                <a:latin typeface="Cambria" pitchFamily="34" charset="0"/>
+                <a:ea typeface="Cambria" pitchFamily="34" charset="-122"/>
+                <a:cs typeface="Cambria" pitchFamily="34" charset="-120"/>
+              </a:rPr>
+              <a:t>Mainnet</a:t>
+            </a:r>
+            <a:r>
+              <a:rPr lang="en-US" sz="2000" b="1" dirty="0">
+                <a:solidFill>
+                  <a:srgbClr val="F5F3EE"/>
+                </a:solidFill>
+                <a:latin typeface="Cambria" pitchFamily="34" charset="0"/>
+                <a:ea typeface="Cambria" pitchFamily="34" charset="-122"/>
+                <a:cs typeface="Cambria" pitchFamily="34" charset="-120"/>
+              </a:rPr>
+              <a:t> Q3 2026 — Series A 2027</a:t>
             </a:r>
             <a:endParaRPr lang="en-US" sz="2000" dirty="0"/>
           </a:p>
@@ -31679,6 +31702,66 @@
         </p:txBody>
       </p:sp>
     </p:spTree>
+  </p:cSld>
+  <p:clrMapOvr>
+    <a:masterClrMapping/>
+  </p:clrMapOvr>
+</p:sld>
+</file>
+
+<file path=ppt/slides/slide7.xml><?xml version="1.0" encoding="utf-8"?>
+<p:sld xmlns:a="http://schemas.openxmlformats.org/drawingml/2006/main" xmlns:r="http://schemas.openxmlformats.org/officeDocument/2006/relationships" xmlns:p="http://schemas.openxmlformats.org/presentationml/2006/main">
+  <p:cSld>
+    <p:spTree>
+      <p:nvGrpSpPr>
+        <p:cNvPr id="1" name=""/>
+        <p:cNvGrpSpPr/>
+        <p:nvPr/>
+      </p:nvGrpSpPr>
+      <p:grpSpPr>
+        <a:xfrm>
+          <a:off x="0" y="0"/>
+          <a:ext cx="0" cy="0"/>
+          <a:chOff x="0" y="0"/>
+          <a:chExt cx="0" cy="0"/>
+        </a:xfrm>
+      </p:grpSpPr>
+      <p:pic>
+        <p:nvPicPr>
+          <p:cNvPr id="3" name="Image 2">
+            <a:extLst>
+              <a:ext uri="{FF2B5EF4-FFF2-40B4-BE49-F238E27FC236}">
+                <a16:creationId xmlns:a16="http://schemas.microsoft.com/office/drawing/2014/main" id="{3B9E8D57-3F8E-6410-5FD3-338FB9127A83}"/>
+              </a:ext>
+            </a:extLst>
+          </p:cNvPr>
+          <p:cNvPicPr>
+            <a:picLocks noChangeAspect="1"/>
+          </p:cNvPicPr>
+          <p:nvPr/>
+        </p:nvPicPr>
+        <p:blipFill>
+          <a:blip r:embed="rId2"/>
+          <a:stretch>
+            <a:fillRect/>
+          </a:stretch>
+        </p:blipFill>
+        <p:spPr>
+          <a:xfrm>
+            <a:off x="3171629" y="1142800"/>
+            <a:ext cx="2800741" cy="2857899"/>
+          </a:xfrm>
+          <a:prstGeom prst="rect">
+            <a:avLst/>
+          </a:prstGeom>
+        </p:spPr>
+      </p:pic>
+    </p:spTree>
+    <p:extLst>
+      <p:ext uri="{BB962C8B-B14F-4D97-AF65-F5344CB8AC3E}">
+        <p14:creationId xmlns:p14="http://schemas.microsoft.com/office/powerpoint/2010/main" val="722243070"/>
+      </p:ext>
+    </p:extLst>
   </p:cSld>
   <p:clrMapOvr>
     <a:masterClrMapping/>
